--- a/slides/decks/s07-gvhd-prophylaxis.pptx
+++ b/slides/decks/s07-gvhd-prophylaxis.pptx
@@ -135,13 +135,13 @@
   <p:extLst>
     <p:ext uri="{521415D9-36F7-43E2-AB2F-B90AF26B5E84}">
       <p14:sectionLst xmlns:p14="http://schemas.microsoft.com/office/powerpoint/2010/main">
-        <p14:section name="Opening" id="{fd72647c-db08-f38c-2c69-2aa7958293c0}">
+        <p14:section name="Opening" id="{7a571b49-86be-e97c-22a5-0b336c4bc65b}">
           <p14:sldIdLst>
             <p14:sldId id="256"/>
             <p14:sldId id="257"/>
           </p14:sldIdLst>
         </p14:section>
-        <p14:section name="Why prophylaxis and CNI backbones" id="{eda85be3-c2a5-96ff-5cc7-64d94060e60d}">
+        <p14:section name="Why prophylaxis and CNI backbones" id="{806c368f-7a44-b481-0abf-6876057ae73e}">
           <p14:sldIdLst>
             <p14:sldId id="258"/>
             <p14:sldId id="259"/>
@@ -150,7 +150,7 @@
             <p14:sldId id="262"/>
           </p14:sldIdLst>
         </p14:section>
-        <p14:section name="Newer agents and serotherapy" id="{dcc837fe-43b9-42b9-6992-b8fdcfe9d821}">
+        <p14:section name="Newer agents and serotherapy" id="{3545e1bd-d8e8-f54b-b114-1d3789042ee2}">
           <p14:sldIdLst>
             <p14:sldId id="263"/>
             <p14:sldId id="264"/>
@@ -159,7 +159,7 @@
             <p14:sldId id="267"/>
           </p14:sldIdLst>
         </p14:section>
-        <p14:section name="PTCy and graft manipulation" id="{92441e6a-fca2-4c0b-0647-a5238c625fc5}">
+        <p14:section name="PTCy and graft manipulation" id="{873ea1fb-91bb-5ea0-60f5-bba73eceebb4}">
           <p14:sldIdLst>
             <p14:sldId id="268"/>
             <p14:sldId id="269"/>
@@ -167,7 +167,7 @@
             <p14:sldId id="271"/>
           </p14:sldIdLst>
         </p14:section>
-        <p14:section name="Board questions" id="{2bb3b9da-a7c2-7942-1027-77992b5aac5c}">
+        <p14:section name="Board questions" id="{a4f61d6d-ce30-1276-290e-ed025d4510bc}">
           <p14:sldIdLst>
             <p14:sldId id="272"/>
             <p14:sldId id="273"/>
@@ -177,7 +177,7 @@
             <p14:sldId id="277"/>
           </p14:sldIdLst>
         </p14:section>
-        <p14:section name="References" id="{ebe1766e-c855-aba8-b49a-ddbe6f7df6e6}">
+        <p14:section name="References" id="{52d9745b-f202-54d8-9cf6-16ff3911ce43}">
           <p14:sldIdLst>
             <p14:sldId id="278"/>
             <p14:sldId id="279"/>
@@ -185,7 +185,7 @@
             <p14:sldId id="281"/>
           </p14:sldIdLst>
         </p14:section>
-        <p14:section name="Backup" id="{faf5d6b1-1c9c-4d81-8658-599c579c66c1}">
+        <p14:section name="Backup" id="{0c71d153-bae8-19ab-15f5-3215c4cc32a4}">
           <p14:sldIdLst>
             <p14:sldId id="282"/>
             <p14:sldId id="283"/>
